--- a/builder/assets/reference-pages/hr-supply-demand-gap.pptx
+++ b/builder/assets/reference-pages/hr-supply-demand-gap.pptx
@@ -1097,7 +1097,7 @@
                   <a:srgbClr val="15375F"/>
                 </a:solidFill>
               </a:rPr>
-              <a:t>三年后关键岗位需求 452 人，内部自然供给仅 284 人，缺口 168 人</a:t>
+              <a:t>Demand for key positions in three years’ time 452 Man, internal natural supply only 284 person, gap 168 people</a:t>
             </a:r>
           </a:p>
         </p:txBody>
@@ -2692,7 +2692,7 @@
                   <a:srgbClr val="15375F"/>
                 </a:solidFill>
               </a:rPr>
-              <a:t>期初</a:t>
+              <a:t>Beginning of period</a:t>
             </a:r>
           </a:p>
         </p:txBody>
@@ -3066,7 +3066,7 @@
                   <a:srgbClr val="15375F"/>
                 </a:solidFill>
               </a:rPr>
-              <a:t>流失</a:t>
+              <a:t>Loss</a:t>
             </a:r>
           </a:p>
         </p:txBody>
@@ -3440,7 +3440,7 @@
                   <a:srgbClr val="15375F"/>
                 </a:solidFill>
               </a:rPr>
-              <a:t>退休</a:t>
+              <a:t>retire</a:t>
             </a:r>
           </a:p>
         </p:txBody>
@@ -3814,7 +3814,7 @@
                   <a:srgbClr val="15375F"/>
                 </a:solidFill>
               </a:rPr>
-              <a:t>晋升</a:t>
+              <a:t>promotion</a:t>
             </a:r>
           </a:p>
         </p:txBody>
@@ -4188,7 +4188,7 @@
                   <a:srgbClr val="15375F"/>
                 </a:solidFill>
               </a:rPr>
-              <a:t>转岗</a:t>
+              <a:t>Transfer</a:t>
             </a:r>
           </a:p>
         </p:txBody>
@@ -4562,7 +4562,7 @@
                   <a:srgbClr val="15375F"/>
                 </a:solidFill>
               </a:rPr>
-              <a:t>内部供给</a:t>
+              <a:t>internal supply</a:t>
             </a:r>
           </a:p>
         </p:txBody>
@@ -4936,7 +4936,7 @@
                   <a:srgbClr val="E8872D"/>
                 </a:solidFill>
               </a:rPr>
-              <a:t>需外补</a:t>
+              <a:t>Need external supplementation</a:t>
             </a:r>
           </a:p>
         </p:txBody>
@@ -5345,7 +5345,7 @@
                   <a:srgbClr val="15375F"/>
                 </a:solidFill>
               </a:rPr>
-              <a:t>补充策略</a:t>
+              <a:t>complementary strategies</a:t>
             </a:r>
           </a:p>
         </p:txBody>
@@ -5401,7 +5401,7 @@
                   <a:srgbClr val="172033"/>
                 </a:solidFill>
               </a:rPr>
-              <a:t>内部培养｜80 人</a:t>
+              <a:t>Internal training｜80 people</a:t>
             </a:r>
           </a:p>
           <a:p xmlns:a="http://schemas.openxmlformats.org/drawingml/2006/main">
@@ -5418,7 +5418,7 @@
                   <a:srgbClr val="172033"/>
                 </a:solidFill>
               </a:rPr>
-              <a:t>周期 12–18月｜8万/人</a:t>
+              <a:t>cycle 12–18month｜8million/people</a:t>
             </a:r>
           </a:p>
           <a:p xmlns:a="http://schemas.openxmlformats.org/drawingml/2006/main">
@@ -5435,7 +5435,7 @@
                   <a:srgbClr val="172033"/>
                 </a:solidFill>
               </a:rPr>
-              <a:t>风险：转化不及预期</a:t>
+              <a:t>Risk: Conversion not as expected</a:t>
             </a:r>
           </a:p>
         </p:txBody>
@@ -5491,7 +5491,7 @@
                   <a:srgbClr val="172033"/>
                 </a:solidFill>
               </a:rPr>
-              <a:t>外部招聘｜60 人</a:t>
+              <a:t>External recruitment｜60 people</a:t>
             </a:r>
           </a:p>
           <a:p xmlns:a="http://schemas.openxmlformats.org/drawingml/2006/main">
@@ -5508,7 +5508,7 @@
                   <a:srgbClr val="172033"/>
                 </a:solidFill>
               </a:rPr>
-              <a:t>周期 6–9月｜12万/人</a:t>
+              <a:t>cycle 6–9month｜12million/people</a:t>
             </a:r>
           </a:p>
           <a:p xmlns:a="http://schemas.openxmlformats.org/drawingml/2006/main">
@@ -5525,7 +5525,7 @@
                   <a:srgbClr val="172033"/>
                 </a:solidFill>
               </a:rPr>
-              <a:t>风险：市场供给紧张</a:t>
+              <a:t>Risk: Market supply is tight</a:t>
             </a:r>
           </a:p>
         </p:txBody>
@@ -5581,7 +5581,7 @@
                   <a:srgbClr val="172033"/>
                 </a:solidFill>
               </a:rPr>
-              <a:t>外包或 AI 替代｜28 人</a:t>
+              <a:t>Outsourcing or AI substitute｜28 people</a:t>
             </a:r>
           </a:p>
           <a:p xmlns:a="http://schemas.openxmlformats.org/drawingml/2006/main">
@@ -5598,7 +5598,7 @@
                   <a:srgbClr val="172033"/>
                 </a:solidFill>
               </a:rPr>
-              <a:t>周期 3–6月｜6万/人</a:t>
+              <a:t>cycle 3–6month｜6million/people</a:t>
             </a:r>
           </a:p>
           <a:p xmlns:a="http://schemas.openxmlformats.org/drawingml/2006/main">
@@ -5615,7 +5615,7 @@
                   <a:srgbClr val="172033"/>
                 </a:solidFill>
               </a:rPr>
-              <a:t>风险：质量与采用风险</a:t>
+              <a:t>Risk: Quality and Adoption Risk</a:t>
             </a:r>
           </a:p>
         </p:txBody>
@@ -5671,7 +5671,7 @@
                   <a:srgbClr val="15375F"/>
                 </a:solidFill>
               </a:rPr>
-              <a:t>用内部培养 80 人、外部招聘 60 人、外包或 AI 替代 28 人关闭缺口</a:t>
+              <a:t>cultivate internally 80 People, external recruitment 60 people, outsourcing or AI substitute 28 man closing gap</a:t>
             </a:r>
           </a:p>
         </p:txBody>
